--- a/day03.pptx
+++ b/day03.pptx
@@ -656,7 +656,7 @@
           <a:p>
             <a:fld id="{2B346891-79C8-8C42-A264-D9976EDAD437}" type="datetimeFigureOut">
               <a:rPr lang="en-US" smtClean="0"/>
-              <a:t>8/13/26</a:t>
+              <a:t>8/17/26</a:t>
             </a:fld>
             <a:endParaRPr lang="en-US"/>
           </a:p>
@@ -1157,7 +1157,7 @@
           <a:p>
             <a:fld id="{2160428C-B2E7-3E4C-BEA2-61A621D3A559}" type="datetimeFigureOut">
               <a:rPr lang="en-US" smtClean="0"/>
-              <a:t>8/13/26</a:t>
+              <a:t>8/17/26</a:t>
             </a:fld>
             <a:endParaRPr lang="en-US"/>
           </a:p>
@@ -1357,7 +1357,7 @@
           <a:p>
             <a:fld id="{2160428C-B2E7-3E4C-BEA2-61A621D3A559}" type="datetimeFigureOut">
               <a:rPr lang="en-US" smtClean="0"/>
-              <a:t>8/13/26</a:t>
+              <a:t>8/17/26</a:t>
             </a:fld>
             <a:endParaRPr lang="en-US"/>
           </a:p>
@@ -1567,7 +1567,7 @@
           <a:p>
             <a:fld id="{2160428C-B2E7-3E4C-BEA2-61A621D3A559}" type="datetimeFigureOut">
               <a:rPr lang="en-US" smtClean="0"/>
-              <a:t>8/13/26</a:t>
+              <a:t>8/17/26</a:t>
             </a:fld>
             <a:endParaRPr lang="en-US"/>
           </a:p>
@@ -1767,7 +1767,7 @@
           <a:p>
             <a:fld id="{2160428C-B2E7-3E4C-BEA2-61A621D3A559}" type="datetimeFigureOut">
               <a:rPr lang="en-US" smtClean="0"/>
-              <a:t>8/13/26</a:t>
+              <a:t>8/17/26</a:t>
             </a:fld>
             <a:endParaRPr lang="en-US"/>
           </a:p>
@@ -2043,7 +2043,7 @@
           <a:p>
             <a:fld id="{2160428C-B2E7-3E4C-BEA2-61A621D3A559}" type="datetimeFigureOut">
               <a:rPr lang="en-US" smtClean="0"/>
-              <a:t>8/13/26</a:t>
+              <a:t>8/17/26</a:t>
             </a:fld>
             <a:endParaRPr lang="en-US"/>
           </a:p>
@@ -2311,7 +2311,7 @@
           <a:p>
             <a:fld id="{2160428C-B2E7-3E4C-BEA2-61A621D3A559}" type="datetimeFigureOut">
               <a:rPr lang="en-US" smtClean="0"/>
-              <a:t>8/13/26</a:t>
+              <a:t>8/17/26</a:t>
             </a:fld>
             <a:endParaRPr lang="en-US"/>
           </a:p>
@@ -2726,7 +2726,7 @@
           <a:p>
             <a:fld id="{2160428C-B2E7-3E4C-BEA2-61A621D3A559}" type="datetimeFigureOut">
               <a:rPr lang="en-US" smtClean="0"/>
-              <a:t>8/13/26</a:t>
+              <a:t>8/17/26</a:t>
             </a:fld>
             <a:endParaRPr lang="en-US"/>
           </a:p>
@@ -2868,7 +2868,7 @@
           <a:p>
             <a:fld id="{2160428C-B2E7-3E4C-BEA2-61A621D3A559}" type="datetimeFigureOut">
               <a:rPr lang="en-US" smtClean="0"/>
-              <a:t>8/13/26</a:t>
+              <a:t>8/17/26</a:t>
             </a:fld>
             <a:endParaRPr lang="en-US"/>
           </a:p>
@@ -2981,7 +2981,7 @@
           <a:p>
             <a:fld id="{2160428C-B2E7-3E4C-BEA2-61A621D3A559}" type="datetimeFigureOut">
               <a:rPr lang="en-US" smtClean="0"/>
-              <a:t>8/13/26</a:t>
+              <a:t>8/17/26</a:t>
             </a:fld>
             <a:endParaRPr lang="en-US"/>
           </a:p>
@@ -3294,7 +3294,7 @@
           <a:p>
             <a:fld id="{2160428C-B2E7-3E4C-BEA2-61A621D3A559}" type="datetimeFigureOut">
               <a:rPr lang="en-US" smtClean="0"/>
-              <a:t>8/13/26</a:t>
+              <a:t>8/17/26</a:t>
             </a:fld>
             <a:endParaRPr lang="en-US"/>
           </a:p>
@@ -3583,7 +3583,7 @@
           <a:p>
             <a:fld id="{2160428C-B2E7-3E4C-BEA2-61A621D3A559}" type="datetimeFigureOut">
               <a:rPr lang="en-US" smtClean="0"/>
-              <a:t>8/13/26</a:t>
+              <a:t>8/17/26</a:t>
             </a:fld>
             <a:endParaRPr lang="en-US"/>
           </a:p>
@@ -3826,7 +3826,7 @@
           <a:p>
             <a:fld id="{2160428C-B2E7-3E4C-BEA2-61A621D3A559}" type="datetimeFigureOut">
               <a:rPr lang="en-US" smtClean="0"/>
-              <a:t>8/13/26</a:t>
+              <a:t>8/17/26</a:t>
             </a:fld>
             <a:endParaRPr lang="en-US"/>
           </a:p>
@@ -5503,19 +5503,40 @@
               <a:t>Heading</a:t>
             </a:r>
             <a:br>
+              <a:rPr lang="en-US" dirty="0"/>
+            </a:br>
+            <a:r>
+              <a:rPr lang="en-US" dirty="0"/>
+              <a:t>Paragraph</a:t>
+            </a:r>
+            <a:br>
+              <a:rPr lang="en-US" dirty="0"/>
+            </a:br>
+            <a:r>
+              <a:rPr lang="en-US" dirty="0"/>
+              <a:t>Links</a:t>
+            </a:r>
+            <a:br>
+              <a:rPr lang="en-US" dirty="0"/>
+            </a:br>
+            <a:r>
+              <a:rPr lang="en-US" dirty="0"/>
+              <a:t>	internal-external</a:t>
+            </a:r>
+            <a:br>
+              <a:rPr lang="en-US" dirty="0"/>
+            </a:br>
+            <a:r>
+              <a:rPr lang="en-US" dirty="0" err="1"/>
+              <a:t>tron,tron</a:t>
+            </a:r>
+            <a:r>
               <a:rPr lang="en-US"/>
-            </a:br>
-            <a:r>
-              <a:rPr lang="en-US"/>
-              <a:t>Paragraph</a:t>
+              <a:t> 2</a:t>
             </a:r>
             <a:br>
               <a:rPr lang="en-US"/>
             </a:br>
-            <a:r>
-              <a:rPr lang="en-US"/>
-              <a:t>Links</a:t>
-            </a:r>
             <a:endParaRPr lang="en-US" dirty="0"/>
           </a:p>
         </p:txBody>

--- a/day03.pptx
+++ b/day03.pptx
@@ -656,7 +656,7 @@
           <a:p>
             <a:fld id="{2B346891-79C8-8C42-A264-D9976EDAD437}" type="datetimeFigureOut">
               <a:rPr lang="en-US" smtClean="0"/>
-              <a:t>8/17/26</a:t>
+              <a:t>8/19/26</a:t>
             </a:fld>
             <a:endParaRPr lang="en-US"/>
           </a:p>
@@ -1157,7 +1157,7 @@
           <a:p>
             <a:fld id="{2160428C-B2E7-3E4C-BEA2-61A621D3A559}" type="datetimeFigureOut">
               <a:rPr lang="en-US" smtClean="0"/>
-              <a:t>8/17/26</a:t>
+              <a:t>8/19/26</a:t>
             </a:fld>
             <a:endParaRPr lang="en-US"/>
           </a:p>
@@ -1357,7 +1357,7 @@
           <a:p>
             <a:fld id="{2160428C-B2E7-3E4C-BEA2-61A621D3A559}" type="datetimeFigureOut">
               <a:rPr lang="en-US" smtClean="0"/>
-              <a:t>8/17/26</a:t>
+              <a:t>8/19/26</a:t>
             </a:fld>
             <a:endParaRPr lang="en-US"/>
           </a:p>
@@ -1567,7 +1567,7 @@
           <a:p>
             <a:fld id="{2160428C-B2E7-3E4C-BEA2-61A621D3A559}" type="datetimeFigureOut">
               <a:rPr lang="en-US" smtClean="0"/>
-              <a:t>8/17/26</a:t>
+              <a:t>8/19/26</a:t>
             </a:fld>
             <a:endParaRPr lang="en-US"/>
           </a:p>
@@ -1767,7 +1767,7 @@
           <a:p>
             <a:fld id="{2160428C-B2E7-3E4C-BEA2-61A621D3A559}" type="datetimeFigureOut">
               <a:rPr lang="en-US" smtClean="0"/>
-              <a:t>8/17/26</a:t>
+              <a:t>8/19/26</a:t>
             </a:fld>
             <a:endParaRPr lang="en-US"/>
           </a:p>
@@ -2043,7 +2043,7 @@
           <a:p>
             <a:fld id="{2160428C-B2E7-3E4C-BEA2-61A621D3A559}" type="datetimeFigureOut">
               <a:rPr lang="en-US" smtClean="0"/>
-              <a:t>8/17/26</a:t>
+              <a:t>8/19/26</a:t>
             </a:fld>
             <a:endParaRPr lang="en-US"/>
           </a:p>
@@ -2311,7 +2311,7 @@
           <a:p>
             <a:fld id="{2160428C-B2E7-3E4C-BEA2-61A621D3A559}" type="datetimeFigureOut">
               <a:rPr lang="en-US" smtClean="0"/>
-              <a:t>8/17/26</a:t>
+              <a:t>8/19/26</a:t>
             </a:fld>
             <a:endParaRPr lang="en-US"/>
           </a:p>
@@ -2726,7 +2726,7 @@
           <a:p>
             <a:fld id="{2160428C-B2E7-3E4C-BEA2-61A621D3A559}" type="datetimeFigureOut">
               <a:rPr lang="en-US" smtClean="0"/>
-              <a:t>8/17/26</a:t>
+              <a:t>8/19/26</a:t>
             </a:fld>
             <a:endParaRPr lang="en-US"/>
           </a:p>
@@ -2868,7 +2868,7 @@
           <a:p>
             <a:fld id="{2160428C-B2E7-3E4C-BEA2-61A621D3A559}" type="datetimeFigureOut">
               <a:rPr lang="en-US" smtClean="0"/>
-              <a:t>8/17/26</a:t>
+              <a:t>8/19/26</a:t>
             </a:fld>
             <a:endParaRPr lang="en-US"/>
           </a:p>
@@ -2981,7 +2981,7 @@
           <a:p>
             <a:fld id="{2160428C-B2E7-3E4C-BEA2-61A621D3A559}" type="datetimeFigureOut">
               <a:rPr lang="en-US" smtClean="0"/>
-              <a:t>8/17/26</a:t>
+              <a:t>8/19/26</a:t>
             </a:fld>
             <a:endParaRPr lang="en-US"/>
           </a:p>
@@ -3294,7 +3294,7 @@
           <a:p>
             <a:fld id="{2160428C-B2E7-3E4C-BEA2-61A621D3A559}" type="datetimeFigureOut">
               <a:rPr lang="en-US" smtClean="0"/>
-              <a:t>8/17/26</a:t>
+              <a:t>8/19/26</a:t>
             </a:fld>
             <a:endParaRPr lang="en-US"/>
           </a:p>
@@ -3583,7 +3583,7 @@
           <a:p>
             <a:fld id="{2160428C-B2E7-3E4C-BEA2-61A621D3A559}" type="datetimeFigureOut">
               <a:rPr lang="en-US" smtClean="0"/>
-              <a:t>8/17/26</a:t>
+              <a:t>8/19/26</a:t>
             </a:fld>
             <a:endParaRPr lang="en-US"/>
           </a:p>
@@ -3826,7 +3826,7 @@
           <a:p>
             <a:fld id="{2160428C-B2E7-3E4C-BEA2-61A621D3A559}" type="datetimeFigureOut">
               <a:rPr lang="en-US" smtClean="0"/>
-              <a:t>8/17/26</a:t>
+              <a:t>8/19/26</a:t>
             </a:fld>
             <a:endParaRPr lang="en-US"/>
           </a:p>
@@ -5495,7 +5495,9 @@
           </a:xfrm>
         </p:spPr>
         <p:txBody>
-          <a:bodyPr/>
+          <a:bodyPr numCol="2">
+            <a:normAutofit/>
+          </a:bodyPr>
           <a:lstStyle/>
           <a:p>
             <a:r>
@@ -5531,13 +5533,58 @@
               <a:t>tron,tron</a:t>
             </a:r>
             <a:r>
-              <a:rPr lang="en-US"/>
+              <a:rPr lang="en-US" dirty="0"/>
               <a:t> 2</a:t>
             </a:r>
             <a:br>
-              <a:rPr lang="en-US"/>
+              <a:rPr lang="en-US" dirty="0"/>
             </a:br>
-            <a:endParaRPr lang="en-US" dirty="0"/>
+            <a:r>
+              <a:rPr lang="en-US" dirty="0"/>
+              <a:t>images</a:t>
+            </a:r>
+            <a:br>
+              <a:rPr lang="en-US" dirty="0"/>
+            </a:br>
+            <a:r>
+              <a:rPr lang="en-US" dirty="0"/>
+              <a:t>inline vs block element</a:t>
+            </a:r>
+            <a:br>
+              <a:rPr lang="en-US" dirty="0"/>
+            </a:br>
+            <a:r>
+              <a:rPr lang="en-US" dirty="0" err="1"/>
+              <a:t>Iframe</a:t>
+            </a:r>
+            <a:br>
+              <a:rPr lang="en-US" dirty="0"/>
+            </a:br>
+            <a:r>
+              <a:rPr lang="en-US" dirty="0"/>
+              <a:t>unordered lists</a:t>
+            </a:r>
+            <a:br>
+              <a:rPr lang="en-US" dirty="0"/>
+            </a:br>
+            <a:r>
+              <a:rPr lang="en-US" dirty="0"/>
+              <a:t>ordered lists</a:t>
+            </a:r>
+            <a:br>
+              <a:rPr lang="en-US" dirty="0"/>
+            </a:br>
+            <a:r>
+              <a:rPr lang="en-US" dirty="0"/>
+              <a:t>description</a:t>
+            </a:r>
+            <a:br>
+              <a:rPr lang="en-US" dirty="0"/>
+            </a:br>
+            <a:r>
+              <a:rPr lang="en-US" dirty="0"/>
+              <a:t>tables</a:t>
+            </a:r>
           </a:p>
         </p:txBody>
       </p:sp>

--- a/day03.pptx
+++ b/day03.pptx
@@ -656,7 +656,7 @@
           <a:p>
             <a:fld id="{2B346891-79C8-8C42-A264-D9976EDAD437}" type="datetimeFigureOut">
               <a:rPr lang="en-US" smtClean="0"/>
-              <a:t>8/19/26</a:t>
+              <a:t>8/20/26</a:t>
             </a:fld>
             <a:endParaRPr lang="en-US"/>
           </a:p>
@@ -1157,7 +1157,7 @@
           <a:p>
             <a:fld id="{2160428C-B2E7-3E4C-BEA2-61A621D3A559}" type="datetimeFigureOut">
               <a:rPr lang="en-US" smtClean="0"/>
-              <a:t>8/19/26</a:t>
+              <a:t>8/20/26</a:t>
             </a:fld>
             <a:endParaRPr lang="en-US"/>
           </a:p>
@@ -1357,7 +1357,7 @@
           <a:p>
             <a:fld id="{2160428C-B2E7-3E4C-BEA2-61A621D3A559}" type="datetimeFigureOut">
               <a:rPr lang="en-US" smtClean="0"/>
-              <a:t>8/19/26</a:t>
+              <a:t>8/20/26</a:t>
             </a:fld>
             <a:endParaRPr lang="en-US"/>
           </a:p>
@@ -1567,7 +1567,7 @@
           <a:p>
             <a:fld id="{2160428C-B2E7-3E4C-BEA2-61A621D3A559}" type="datetimeFigureOut">
               <a:rPr lang="en-US" smtClean="0"/>
-              <a:t>8/19/26</a:t>
+              <a:t>8/20/26</a:t>
             </a:fld>
             <a:endParaRPr lang="en-US"/>
           </a:p>
@@ -1767,7 +1767,7 @@
           <a:p>
             <a:fld id="{2160428C-B2E7-3E4C-BEA2-61A621D3A559}" type="datetimeFigureOut">
               <a:rPr lang="en-US" smtClean="0"/>
-              <a:t>8/19/26</a:t>
+              <a:t>8/20/26</a:t>
             </a:fld>
             <a:endParaRPr lang="en-US"/>
           </a:p>
@@ -2043,7 +2043,7 @@
           <a:p>
             <a:fld id="{2160428C-B2E7-3E4C-BEA2-61A621D3A559}" type="datetimeFigureOut">
               <a:rPr lang="en-US" smtClean="0"/>
-              <a:t>8/19/26</a:t>
+              <a:t>8/20/26</a:t>
             </a:fld>
             <a:endParaRPr lang="en-US"/>
           </a:p>
@@ -2311,7 +2311,7 @@
           <a:p>
             <a:fld id="{2160428C-B2E7-3E4C-BEA2-61A621D3A559}" type="datetimeFigureOut">
               <a:rPr lang="en-US" smtClean="0"/>
-              <a:t>8/19/26</a:t>
+              <a:t>8/20/26</a:t>
             </a:fld>
             <a:endParaRPr lang="en-US"/>
           </a:p>
@@ -2726,7 +2726,7 @@
           <a:p>
             <a:fld id="{2160428C-B2E7-3E4C-BEA2-61A621D3A559}" type="datetimeFigureOut">
               <a:rPr lang="en-US" smtClean="0"/>
-              <a:t>8/19/26</a:t>
+              <a:t>8/20/26</a:t>
             </a:fld>
             <a:endParaRPr lang="en-US"/>
           </a:p>
@@ -2868,7 +2868,7 @@
           <a:p>
             <a:fld id="{2160428C-B2E7-3E4C-BEA2-61A621D3A559}" type="datetimeFigureOut">
               <a:rPr lang="en-US" smtClean="0"/>
-              <a:t>8/19/26</a:t>
+              <a:t>8/20/26</a:t>
             </a:fld>
             <a:endParaRPr lang="en-US"/>
           </a:p>
@@ -2981,7 +2981,7 @@
           <a:p>
             <a:fld id="{2160428C-B2E7-3E4C-BEA2-61A621D3A559}" type="datetimeFigureOut">
               <a:rPr lang="en-US" smtClean="0"/>
-              <a:t>8/19/26</a:t>
+              <a:t>8/20/26</a:t>
             </a:fld>
             <a:endParaRPr lang="en-US"/>
           </a:p>
@@ -3294,7 +3294,7 @@
           <a:p>
             <a:fld id="{2160428C-B2E7-3E4C-BEA2-61A621D3A559}" type="datetimeFigureOut">
               <a:rPr lang="en-US" smtClean="0"/>
-              <a:t>8/19/26</a:t>
+              <a:t>8/20/26</a:t>
             </a:fld>
             <a:endParaRPr lang="en-US"/>
           </a:p>
@@ -3583,7 +3583,7 @@
           <a:p>
             <a:fld id="{2160428C-B2E7-3E4C-BEA2-61A621D3A559}" type="datetimeFigureOut">
               <a:rPr lang="en-US" smtClean="0"/>
-              <a:t>8/19/26</a:t>
+              <a:t>8/20/26</a:t>
             </a:fld>
             <a:endParaRPr lang="en-US"/>
           </a:p>
@@ -3826,7 +3826,7 @@
           <a:p>
             <a:fld id="{2160428C-B2E7-3E4C-BEA2-61A621D3A559}" type="datetimeFigureOut">
               <a:rPr lang="en-US" smtClean="0"/>
-              <a:t>8/19/26</a:t>
+              <a:t>8/20/26</a:t>
             </a:fld>
             <a:endParaRPr lang="en-US"/>
           </a:p>
@@ -5585,6 +5585,28 @@
               <a:rPr lang="en-US" dirty="0"/>
               <a:t>tables</a:t>
             </a:r>
+            <a:br>
+              <a:rPr lang="en-US" dirty="0"/>
+            </a:br>
+            <a:r>
+              <a:rPr lang="en-US" dirty="0"/>
+              <a:t>Word Decoration</a:t>
+            </a:r>
+            <a:br>
+              <a:rPr lang="en-US" dirty="0"/>
+            </a:br>
+            <a:r>
+              <a:rPr lang="en-US" dirty="0"/>
+              <a:t>Comments</a:t>
+            </a:r>
+            <a:br>
+              <a:rPr lang="en-US"/>
+            </a:br>
+            <a:r>
+              <a:rPr lang="en-US"/>
+              <a:t>Project 1 Login Page</a:t>
+            </a:r>
+            <a:endParaRPr lang="en-US" dirty="0"/>
           </a:p>
         </p:txBody>
       </p:sp>
